--- a/OSL_Project_Research_corrected.pptx
+++ b/OSL_Project_Research_corrected.pptx
@@ -5562,7 +5562,7 @@
           <a:p>
             <a:r>
               <a:rPr lang="en-US" altLang="zh-CN"/>
-              <a:t>Why These Three Algorithms</a:t>
+              <a:t>A Possible Combination: ADDRQN + I-SSO</a:t>
             </a:r>
             <a:endParaRPr lang="en-US" altLang="zh-CN"/>
           </a:p>
@@ -5589,53 +5589,51 @@
               <a:buNone/>
             </a:pPr>
             <a:r>
-              <a:rPr lang="en-US" altLang="zh-CN" sz="1600"/>
-              <a:t>Each of the three addresses one of the three main challenges, and together they cover all of them.</a:t>
-            </a:r>
-            <a:endParaRPr lang="en-US" altLang="zh-CN" sz="1600"/>
+              <a:rPr lang="en-US" altLang="zh-CN" sz="1400"/>
+              <a:t>I-SSO contributes hand-designed exploration; ADDRQN contributes a learned policy under partial observation. Combining them targets five weaknesses neither addresses alone.</a:t>
+            </a:r>
+            <a:endParaRPr lang="en-US" altLang="zh-CN" sz="1400"/>
           </a:p>
           <a:p>
             <a:pPr marL="0" indent="0">
               <a:buNone/>
             </a:pPr>
-            <a:endParaRPr lang="en-US" altLang="zh-CN" sz="1600"/>
-          </a:p>
-          <a:p>
-            <a:r>
-              <a:rPr lang="en-US" altLang="zh-CN" sz="1600"/>
-              <a:t>I-SSO — avoidance of local optima: variance-triggered escape plus rotational exploration, already validated against an interference source in CFD.</a:t>
-            </a:r>
-            <a:endParaRPr lang="en-US" altLang="zh-CN" sz="1600"/>
-          </a:p>
-          <a:p>
-            <a:r>
-              <a:rPr lang="en-US" altLang="zh-CN" sz="1600"/>
-              <a:t>DIAS — identification of individual sources: Voronoi division and Gaussian-process regression handle an unknown and potentially large number of sources.</a:t>
-            </a:r>
-            <a:endParaRPr lang="en-US" altLang="zh-CN" sz="1600"/>
-          </a:p>
-          <a:p>
-            <a:r>
-              <a:rPr lang="en-US" altLang="zh-CN" sz="1600"/>
-              <a:t>ADDRQN — swarm cooperation: teammate encoding and recurrent state keep the policy robust under partial observation and UAV failure.</a:t>
-            </a:r>
-            <a:endParaRPr lang="en-US" altLang="zh-CN" sz="1600"/>
-          </a:p>
-          <a:p>
-            <a:pPr marL="0" indent="0">
-              <a:buNone/>
-            </a:pPr>
-            <a:endParaRPr lang="en-US" altLang="zh-CN" sz="1600"/>
-          </a:p>
-          <a:p>
-            <a:pPr marL="0" indent="0">
-              <a:buNone/>
-            </a:pPr>
-            <a:r>
-              <a:rPr lang="en-US" altLang="zh-CN" sz="1600"/>
-              <a:t>They are also compatible. All three operate on the same inputs (concentration measurements plus robot poses), and each contributes a different layer — exploration heuristic, source-density estimation, and learned control policy — which is what makes the Stage II combination feasible rather than redundant.</a:t>
-            </a:r>
-            <a:endParaRPr lang="en-US" altLang="zh-CN" sz="1600"/>
+            <a:endParaRPr lang="en-US" altLang="zh-CN" sz="1400"/>
+          </a:p>
+          <a:p>
+            <a:r>
+              <a:rPr lang="en-US" altLang="zh-CN" sz="1400"/>
+              <a:t>Sample efficiency — rotation sampling replaces ε-greedy with a structured exploration prior, so fewer episodes are spent on uninformative random actions.</a:t>
+            </a:r>
+            <a:endParaRPr lang="en-US" altLang="zh-CN" sz="1400"/>
+          </a:p>
+          <a:p>
+            <a:r>
+              <a:rPr lang="en-US" altLang="zh-CN" sz="1400"/>
+              <a:t>Local optima — variance-triggered escape is an explicit stall signal that RL would otherwise have to discover through reward shaping, and it transfers to re-finding a plume after one source is claimed.</a:t>
+            </a:r>
+            <a:endParaRPr lang="en-US" altLang="zh-CN" sz="1400"/>
+          </a:p>
+          <a:p>
+            <a:r>
+              <a:rPr lang="en-US" altLang="zh-CN" sz="1400"/>
+              <a:t>Plume intermittency — ADDRQN’s action-conditioned recurrent state covers exactly where I-SSO’s gradient assumption fails: a zero reading becomes informative rather than misleading.</a:t>
+            </a:r>
+            <a:endParaRPr lang="en-US" altLang="zh-CN" sz="1400"/>
+          </a:p>
+          <a:p>
+            <a:r>
+              <a:rPr lang="en-US" altLang="zh-CN" sz="1400"/>
+              <a:t>Transfer cost — rotating in place is nearly free on a real robot, keeping the learned action set cheap enough to move from simulation to hardware.</a:t>
+            </a:r>
+            <a:endParaRPr lang="en-US" altLang="zh-CN" sz="1400"/>
+          </a:p>
+          <a:p>
+            <a:r>
+              <a:rPr lang="en-US" altLang="zh-CN" sz="1400"/>
+              <a:t>Interpretability — the variance trigger gives a readable reason for each behaviour switch, which a bare Q-network cannot offer.</a:t>
+            </a:r>
+            <a:endParaRPr lang="en-US" altLang="zh-CN" sz="1400"/>
           </a:p>
         </p:txBody>
       </p:sp>
